--- a/docs/Week06_CollectionFramework.pptx
+++ b/docs/Week06_CollectionFramework.pptx
@@ -3419,16 +3419,8 @@
           </a:bodyPr>
           <a:lstStyle/>
           <a:p>
-            <a:pPr>
-              <a:defRPr sz="2400" b="1">
-                <a:solidFill>
-                  <a:srgbClr val="0EA5E9"/>
-                </a:solidFill>
-                <a:latin typeface="Georgia"/>
-              </a:defRPr>
-            </a:pPr>
-            <a:r>
-              <a:t>실습 2: 학생 성적 정렬</a:t>
+            <a:r>
+              <a:t>실습 2: 아이템 명세 관리</a:t>
             </a:r>
           </a:p>
         </p:txBody>
@@ -3455,67 +3447,28 @@
           </a:bodyPr>
           <a:lstStyle/>
           <a:p>
-            <a:pPr>
-              <a:spcAft>
-                <a:spcPts val="600"/>
-              </a:spcAft>
-              <a:defRPr sz="1500">
-                <a:solidFill>
-                  <a:srgbClr val="1E293B"/>
-                </a:solidFill>
-                <a:latin typeface="Calibri"/>
-              </a:defRPr>
-            </a:pPr>
-            <a:r>
-              <a:t>Student 클래스 설계 (id, name, score)</a:t>
-            </a:r>
-          </a:p>
-          <a:p>
-            <a:pPr>
-              <a:spcAft>
-                <a:spcPts val="600"/>
-              </a:spcAft>
-              <a:defRPr sz="1500">
-                <a:solidFill>
-                  <a:srgbClr val="1E293B"/>
-                </a:solidFill>
-                <a:latin typeface="Calibri"/>
-              </a:defRPr>
-            </a:pPr>
-            <a:r>
-              <a:t>ArrayList&lt;Student&gt;에 5명의 학생 추가</a:t>
-            </a:r>
-          </a:p>
-          <a:p>
-            <a:pPr>
-              <a:spcAft>
-                <a:spcPts val="600"/>
-              </a:spcAft>
-              <a:defRPr sz="1500">
-                <a:solidFill>
-                  <a:srgbClr val="1E293B"/>
-                </a:solidFill>
-                <a:latin typeface="Calibri"/>
-              </a:defRPr>
-            </a:pPr>
-            <a:r>
-              <a:t>점수 내림차순 정렬 (같으면 ID 오름차순)</a:t>
-            </a:r>
-          </a:p>
-          <a:p>
-            <a:pPr>
-              <a:spcAft>
-                <a:spcPts val="600"/>
-              </a:spcAft>
-              <a:defRPr sz="1500">
-                <a:solidFill>
-                  <a:srgbClr val="1E293B"/>
-                </a:solidFill>
-                <a:latin typeface="Calibri"/>
-              </a:defRPr>
-            </a:pPr>
-            <a:r>
-              <a:t>정렬 후 결과 출력</a:t>
+            <a:r>
+              <a:t>Map&lt;String, ItemSpec&gt; 또는 HashMap을 사용해 아이템 테이블을 작성하시오.</a:t>
+            </a:r>
+          </a:p>
+          <a:p>
+            <a:r>
+              <a:t>1. 아이템 코드와 명세를 3개 이상 등록한다.</a:t>
+            </a:r>
+          </a:p>
+          <a:p>
+            <a:r>
+              <a:t>2. 특정 코드로 아이템을 조회한다.</a:t>
+            </a:r>
+          </a:p>
+          <a:p>
+            <a:r>
+              <a:t>3. 가격 수정 또는 판매 중지 처리를 한다.</a:t>
+            </a:r>
+          </a:p>
+          <a:p>
+            <a:r>
+              <a:t>4. 최종 전체 데이터를 출력한다.</a:t>
             </a:r>
           </a:p>
         </p:txBody>
@@ -3585,35 +3538,13 @@
           </a:bodyPr>
           <a:lstStyle/>
           <a:p>
-            <a:pPr>
-              <a:spcAft>
-                <a:spcPts val="200"/>
-              </a:spcAft>
-              <a:defRPr sz="1200">
-                <a:solidFill>
-                  <a:srgbClr val="E2E8F0"/>
-                </a:solidFill>
-                <a:latin typeface="Consolas"/>
-              </a:defRPr>
-            </a:pPr>
-            <a:r>
-              <a:t>java StudentSort</a:t>
-            </a:r>
-          </a:p>
-          <a:p>
-            <a:pPr>
-              <a:spcAft>
-                <a:spcPts val="200"/>
-              </a:spcAft>
-              <a:defRPr sz="1200">
-                <a:solidFill>
-                  <a:srgbClr val="E2E8F0"/>
-                </a:solidFill>
-                <a:latin typeface="Consolas"/>
-              </a:defRPr>
-            </a:pPr>
-            <a:r>
-              <a:t># 정렬 기준에 따른 출력</a:t>
+            <a:r>
+              <a:t>java -cp out/classes chapter06.ex02.Ex02</a:t>
+            </a:r>
+          </a:p>
+          <a:p>
+            <a:r>
+              <a:t># 코드 기반 조회 확인</a:t>
             </a:r>
           </a:p>
         </p:txBody>
@@ -3816,67 +3747,28 @@
           </a:bodyPr>
           <a:lstStyle/>
           <a:p>
-            <a:pPr>
-              <a:spcAft>
-                <a:spcPts val="1000"/>
-              </a:spcAft>
-              <a:defRPr sz="1400">
-                <a:solidFill>
-                  <a:srgbClr val="FFFFFF"/>
-                </a:solidFill>
-                <a:latin typeface="Calibri"/>
-              </a:defRPr>
-            </a:pPr>
-            <a:r>
-              <a:t>Q1. `List&lt;String&gt;`에서 `String`은 어떤 역할을 하는가?</a:t>
-            </a:r>
-          </a:p>
-          <a:p>
-            <a:pPr>
-              <a:spcAft>
-                <a:spcPts val="1000"/>
-              </a:spcAft>
-              <a:defRPr sz="1400">
-                <a:solidFill>
-                  <a:srgbClr val="FFFFFF"/>
-                </a:solidFill>
-                <a:latin typeface="Calibri"/>
-              </a:defRPr>
-            </a:pPr>
-            <a:r>
-              <a:t>Q2. `names.remove("Bob")` 이후 리스트 상태는 어떻게 바뀌는가?</a:t>
-            </a:r>
-          </a:p>
-          <a:p>
-            <a:pPr>
-              <a:spcAft>
-                <a:spcPts val="1000"/>
-              </a:spcAft>
-              <a:defRPr sz="1400">
-                <a:solidFill>
-                  <a:srgbClr val="FFFFFF"/>
-                </a:solidFill>
-                <a:latin typeface="Calibri"/>
-              </a:defRPr>
-            </a:pPr>
-            <a:r>
-              <a:t>Q3. `Map`에서 키(key)와 값(value)은 각각 어떤 용도로 쓰이는가?</a:t>
-            </a:r>
-          </a:p>
-          <a:p>
-            <a:pPr>
-              <a:spcAft>
-                <a:spcPts val="1000"/>
-              </a:spcAft>
-              <a:defRPr sz="1400">
-                <a:solidFill>
-                  <a:srgbClr val="FFFFFF"/>
-                </a:solidFill>
-                <a:latin typeface="Calibri"/>
-              </a:defRPr>
-            </a:pPr>
-            <a:r>
-              <a:t>Q4. `thenComparingInt()`는 왜 필요한가? 없으면 어떤 문제가 생기는가?</a:t>
+            <a:r>
+              <a:t>Q1. List&lt;String&gt;에서 String은 어떤 역할을 하는가?</a:t>
+            </a:r>
+          </a:p>
+          <a:p>
+            <a:r>
+              <a:t>Q2. List에서 중간 삽입이나 삭제를 하면 무엇이 바뀌는가?</a:t>
+            </a:r>
+          </a:p>
+          <a:p>
+            <a:r>
+              <a:t>Q3. Map에서 키와 값은 각각 어떤 용도로 쓰이는가?</a:t>
+            </a:r>
+          </a:p>
+          <a:p>
+            <a:r>
+              <a:t>Q4. 게임 파티 관리는 왜 List가 더 적합한가?</a:t>
+            </a:r>
+          </a:p>
+          <a:p>
+            <a:r>
+              <a:t>Q5. 아이템 명세 관리는 왜 Map이 더 적합한가?</a:t>
             </a:r>
           </a:p>
         </p:txBody>
@@ -3982,67 +3874,28 @@
           </a:bodyPr>
           <a:lstStyle/>
           <a:p>
-            <a:pPr>
-              <a:spcAft>
-                <a:spcPts val="800"/>
-              </a:spcAft>
-              <a:defRPr sz="1200">
-                <a:solidFill>
-                  <a:srgbClr val="CADCFC"/>
-                </a:solidFill>
-                <a:latin typeface="Calibri"/>
-              </a:defRPr>
-            </a:pPr>
-            <a:r>
-              <a:t>① `List&lt;Integer&gt;`로 점수 목록을 관리하고 합계/평균 출력하기</a:t>
-            </a:r>
-          </a:p>
-          <a:p>
-            <a:pPr>
-              <a:spcAft>
-                <a:spcPts val="800"/>
-              </a:spcAft>
-              <a:defRPr sz="1200">
-                <a:solidFill>
-                  <a:srgbClr val="CADCFC"/>
-                </a:solidFill>
-                <a:latin typeface="Calibri"/>
-              </a:defRPr>
-            </a:pPr>
-            <a:r>
-              <a:t>② `Map&lt;String, Integer&gt;`로 과목별 점수를 저장하고 조회하기</a:t>
-            </a:r>
-          </a:p>
-          <a:p>
-            <a:pPr>
-              <a:spcAft>
-                <a:spcPts val="800"/>
-              </a:spcAft>
-              <a:defRPr sz="1200">
-                <a:solidFill>
-                  <a:srgbClr val="CADCFC"/>
-                </a:solidFill>
-                <a:latin typeface="Calibri"/>
-              </a:defRPr>
-            </a:pPr>
-            <a:r>
-              <a:t>③ 학생 이름 기준 알파벳 정렬을 추가하기</a:t>
-            </a:r>
-          </a:p>
-          <a:p>
-            <a:pPr>
-              <a:spcAft>
-                <a:spcPts val="800"/>
-              </a:spcAft>
-              <a:defRPr sz="1200">
-                <a:solidFill>
-                  <a:srgbClr val="CADCFC"/>
-                </a:solidFill>
-                <a:latin typeface="Calibri"/>
-              </a:defRPr>
-            </a:pPr>
-            <a:r>
-              <a:t>④ 점수 기준 상위 N명을 추출하는 로직 작성하기</a:t>
+            <a:r>
+              <a:t>① List&lt;Integer&gt;로 점수 목록 관리하기</a:t>
+            </a:r>
+          </a:p>
+          <a:p>
+            <a:r>
+              <a:t>② Map&lt;String, Integer&gt;로 과목별 점수 저장하기</a:t>
+            </a:r>
+          </a:p>
+          <a:p>
+            <a:r>
+              <a:t>③ 파티 캐릭터 평균 레벨 구하기</a:t>
+            </a:r>
+          </a:p>
+          <a:p>
+            <a:r>
+              <a:t>④ 가장 비싼 아이템 찾기</a:t>
+            </a:r>
+          </a:p>
+          <a:p>
+            <a:r>
+              <a:t>⑤ 특정 등급 아이템만 출력하기</a:t>
             </a:r>
           </a:p>
         </p:txBody>
@@ -4166,99 +4019,28 @@
           </a:bodyPr>
           <a:lstStyle/>
           <a:p>
-            <a:pPr>
-              <a:spcAft>
-                <a:spcPts val="1000"/>
-              </a:spcAft>
-              <a:defRPr sz="1600">
-                <a:solidFill>
-                  <a:srgbClr val="CADCFC"/>
-                </a:solidFill>
-                <a:latin typeface="Calibri"/>
-              </a:defRPr>
-            </a:pPr>
-            <a:r>
-              <a:t>List: 순서 있는 컬렉션, ArrayList/LinkedList는 내부 구조 이해 중요</a:t>
-            </a:r>
-          </a:p>
-          <a:p>
-            <a:pPr>
-              <a:spcAft>
-                <a:spcPts val="1000"/>
-              </a:spcAft>
-              <a:defRPr sz="1600">
-                <a:solidFill>
-                  <a:srgbClr val="CADCFC"/>
-                </a:solidFill>
-                <a:latin typeface="Calibri"/>
-              </a:defRPr>
-            </a:pPr>
-            <a:r>
-              <a:t>Set: 중복 없는 유일한 원소들, 순서는 보장 안 함</a:t>
-            </a:r>
-          </a:p>
-          <a:p>
-            <a:pPr>
-              <a:spcAft>
-                <a:spcPts val="1000"/>
-              </a:spcAft>
-              <a:defRPr sz="1600">
-                <a:solidFill>
-                  <a:srgbClr val="CADCFC"/>
-                </a:solidFill>
-                <a:latin typeface="Calibri"/>
-              </a:defRPr>
-            </a:pPr>
-            <a:r>
-              <a:t>Map: 키-값 쌍으로 데이터 관리, 키로 빠른 검색</a:t>
-            </a:r>
-          </a:p>
-          <a:p>
-            <a:pPr>
-              <a:spcAft>
-                <a:spcPts val="1000"/>
-              </a:spcAft>
-              <a:defRPr sz="1600">
-                <a:solidFill>
-                  <a:srgbClr val="CADCFC"/>
-                </a:solidFill>
-                <a:latin typeface="Calibri"/>
-              </a:defRPr>
-            </a:pPr>
-            <a:r>
-              <a:t>제네릭스로 타입 안정성 확보, 형변환 제거</a:t>
-            </a:r>
-          </a:p>
-          <a:p>
-            <a:pPr>
-              <a:spcAft>
-                <a:spcPts val="1000"/>
-              </a:spcAft>
-              <a:defRPr sz="1600">
-                <a:solidFill>
-                  <a:srgbClr val="CADCFC"/>
-                </a:solidFill>
-                <a:latin typeface="Calibri"/>
-              </a:defRPr>
-            </a:pPr>
-            <a:r>
-              <a:t>Comparator로 복합적인 정렬 조건 처리 가능</a:t>
-            </a:r>
-          </a:p>
-          <a:p>
-            <a:pPr>
-              <a:spcAft>
-                <a:spcPts val="1000"/>
-              </a:spcAft>
-              <a:defRPr sz="1600">
-                <a:solidFill>
-                  <a:srgbClr val="CADCFC"/>
-                </a:solidFill>
-                <a:latin typeface="Calibri"/>
-              </a:defRPr>
-            </a:pPr>
-            <a:r>
-              <a:t>Iterator와 forEach로 효율적인 순회</a:t>
+            <a:r>
+              <a:t>List: 순서 기반 데이터 관리에 적합</a:t>
+            </a:r>
+          </a:p>
+          <a:p>
+            <a:r>
+              <a:t>Map: 키 기반 조회에 적합</a:t>
+            </a:r>
+          </a:p>
+          <a:p>
+            <a:r>
+              <a:t>제네릭으로 타입을 명확히 하면 안전성이 높아진다.</a:t>
+            </a:r>
+          </a:p>
+          <a:p>
+            <a:r>
+              <a:t>게임 예제로 보면 파티 관리는 List, 아이템 명세는 Map이 자연스럽다.</a:t>
+            </a:r>
+          </a:p>
+          <a:p>
+            <a:r>
+              <a:t>컬렉션은 실제 프로그램의 데이터를 구조적으로 다루는 핵심 도구다.</a:t>
             </a:r>
           </a:p>
         </p:txBody>
@@ -4425,16 +4207,8 @@
           </a:bodyPr>
           <a:lstStyle/>
           <a:p>
-            <a:pPr algn="l">
-              <a:defRPr sz="1600">
-                <a:solidFill>
-                  <a:srgbClr val="CADCFC"/>
-                </a:solidFill>
-                <a:latin typeface="Calibri"/>
-              </a:defRPr>
-            </a:pPr>
-            <a:r>
-              <a:t>List, Set, Map의 특성과 사용법</a:t>
+            <a:r>
+              <a:t>List와 Map의 핵심 차이와 게임 데이터 관리 예제</a:t>
             </a:r>
           </a:p>
         </p:txBody>
@@ -4601,147 +4375,33 @@
           </a:bodyPr>
           <a:lstStyle/>
           <a:p>
-            <a:pPr algn="l">
-              <a:spcAft>
-                <a:spcPts val="800"/>
-              </a:spcAft>
-              <a:defRPr sz="1600">
-                <a:solidFill>
-                  <a:srgbClr val="1E293B"/>
-                </a:solidFill>
-                <a:latin typeface="Calibri"/>
-              </a:defRPr>
-            </a:pPr>
             <a:r>
               <a:t>List (리스트): 순서 있음, 중복 허용, 인덱스 접근 가능</a:t>
             </a:r>
           </a:p>
           <a:p>
-            <a:pPr algn="l">
-              <a:spcAft>
-                <a:spcPts val="800"/>
-              </a:spcAft>
-              <a:defRPr sz="1600">
-                <a:solidFill>
-                  <a:srgbClr val="1E293B"/>
-                </a:solidFill>
-                <a:latin typeface="Calibri"/>
-              </a:defRPr>
-            </a:pPr>
-            <a:r>
-              <a:t>  • ArrayList: 동적 배열, 빠른 조회, 느린 삽입/삭제</a:t>
-            </a:r>
-          </a:p>
-          <a:p>
-            <a:pPr algn="l">
-              <a:spcAft>
-                <a:spcPts val="800"/>
-              </a:spcAft>
-              <a:defRPr sz="1600">
-                <a:solidFill>
-                  <a:srgbClr val="1E293B"/>
-                </a:solidFill>
-                <a:latin typeface="Calibri"/>
-              </a:defRPr>
-            </a:pPr>
-            <a:r>
-              <a:t>  • LinkedList: 양방향 링크드 리스트, 빠른 삽입/삭제</a:t>
-            </a:r>
-          </a:p>
-          <a:p>
-            <a:pPr algn="l">
-              <a:spcAft>
-                <a:spcPts val="800"/>
-              </a:spcAft>
-              <a:defRPr sz="1600">
-                <a:solidFill>
-                  <a:srgbClr val="1E293B"/>
-                </a:solidFill>
-                <a:latin typeface="Calibri"/>
-              </a:defRPr>
-            </a:pPr>
-            <a:r>
-              <a:t>Set (집합): 순서 없음, 중복 불가, 유일한 원소만 저장</a:t>
-            </a:r>
-          </a:p>
-          <a:p>
-            <a:pPr algn="l">
-              <a:spcAft>
-                <a:spcPts val="800"/>
-              </a:spcAft>
-              <a:defRPr sz="1600">
-                <a:solidFill>
-                  <a:srgbClr val="1E293B"/>
-                </a:solidFill>
-                <a:latin typeface="Calibri"/>
-              </a:defRPr>
-            </a:pPr>
-            <a:r>
-              <a:t>  • HashSet: 해시 기반, 빠른 조회</a:t>
-            </a:r>
-          </a:p>
-          <a:p>
-            <a:pPr algn="l">
-              <a:spcAft>
-                <a:spcPts val="800"/>
-              </a:spcAft>
-              <a:defRPr sz="1600">
-                <a:solidFill>
-                  <a:srgbClr val="1E293B"/>
-                </a:solidFill>
-                <a:latin typeface="Calibri"/>
-              </a:defRPr>
-            </a:pPr>
-            <a:r>
-              <a:t>  • TreeSet: 정렬된 순서, 범위 검색 가능</a:t>
-            </a:r>
-          </a:p>
-          <a:p>
-            <a:pPr algn="l">
-              <a:spcAft>
-                <a:spcPts val="800"/>
-              </a:spcAft>
-              <a:defRPr sz="1600">
-                <a:solidFill>
-                  <a:srgbClr val="1E293B"/>
-                </a:solidFill>
-                <a:latin typeface="Calibri"/>
-              </a:defRPr>
-            </a:pPr>
-            <a:r>
-              <a:t>Map (맵): 키-값 쌍, 키는 유일, 값은 중복 가능</a:t>
-            </a:r>
-          </a:p>
-          <a:p>
-            <a:pPr algn="l">
-              <a:spcAft>
-                <a:spcPts val="800"/>
-              </a:spcAft>
-              <a:defRPr sz="1600">
-                <a:solidFill>
-                  <a:srgbClr val="1E293B"/>
-                </a:solidFill>
-                <a:latin typeface="Calibri"/>
-              </a:defRPr>
-            </a:pPr>
-            <a:r>
-              <a:t>  • HashMap: 해시 기반, 빠른 검색</a:t>
-            </a:r>
-          </a:p>
-          <a:p>
-            <a:pPr algn="l">
-              <a:spcAft>
-                <a:spcPts val="800"/>
-              </a:spcAft>
-              <a:defRPr sz="1600">
-                <a:solidFill>
-                  <a:srgbClr val="1E293B"/>
-                </a:solidFill>
-                <a:latin typeface="Calibri"/>
-              </a:defRPr>
-            </a:pPr>
-            <a:r>
-              <a:t>  • TreeMap: 키 순서로 정렬</a:t>
+            <a:r>
+              <a:t>  • 파티 편성, 인벤토리 슬롯, 대기열 관리에 적합</a:t>
+            </a:r>
+          </a:p>
+          <a:p>
+            <a:r>
+              <a:t>Set (집합): 중복 없음, 유일한 값 저장</a:t>
+            </a:r>
+          </a:p>
+          <a:p>
+            <a:r>
+              <a:t>  • 중복 제거, 방문 체크 같은 상황에 적합</a:t>
+            </a:r>
+          </a:p>
+          <a:p>
+            <a:r>
+              <a:t>Map (맵): 키-값 쌍, 키로 빠른 조회 가능</a:t>
+            </a:r>
+          </a:p>
+          <a:p>
+            <a:r>
+              <a:t>  • 아이템 코드, 사용자 ID, 설정값 관리에 적합</a:t>
             </a:r>
           </a:p>
         </p:txBody>
@@ -4908,115 +4568,28 @@
           </a:bodyPr>
           <a:lstStyle/>
           <a:p>
-            <a:pPr algn="l">
-              <a:spcAft>
-                <a:spcPts val="800"/>
-              </a:spcAft>
-              <a:defRPr sz="1600">
-                <a:solidFill>
-                  <a:srgbClr val="1E293B"/>
-                </a:solidFill>
-                <a:latin typeface="Calibri"/>
-              </a:defRPr>
-            </a:pPr>
-            <a:r>
-              <a:t>타입 안정성: 컴파일 시점에 타입 검사</a:t>
-            </a:r>
-          </a:p>
-          <a:p>
-            <a:pPr algn="l">
-              <a:spcAft>
-                <a:spcPts val="800"/>
-              </a:spcAft>
-              <a:defRPr sz="1600">
-                <a:solidFill>
-                  <a:srgbClr val="1E293B"/>
-                </a:solidFill>
-                <a:latin typeface="Calibri"/>
-              </a:defRPr>
-            </a:pPr>
-            <a:r>
-              <a:t>ArrayList&lt;String&gt; list = new ArrayList&lt;&gt;();</a:t>
-            </a:r>
-          </a:p>
-          <a:p>
-            <a:pPr algn="l">
-              <a:spcAft>
-                <a:spcPts val="800"/>
-              </a:spcAft>
-              <a:defRPr sz="1600">
-                <a:solidFill>
-                  <a:srgbClr val="1E293B"/>
-                </a:solidFill>
-                <a:latin typeface="Calibri"/>
-              </a:defRPr>
-            </a:pPr>
-            <a:r>
-              <a:t>list.add("java");  // String만 추가 가능</a:t>
-            </a:r>
-          </a:p>
-          <a:p>
-            <a:pPr algn="l">
-              <a:spcAft>
-                <a:spcPts val="800"/>
-              </a:spcAft>
-              <a:defRPr sz="1600">
-                <a:solidFill>
-                  <a:srgbClr val="1E293B"/>
-                </a:solidFill>
-                <a:latin typeface="Calibri"/>
-              </a:defRPr>
-            </a:pPr>
-            <a:r>
-              <a:t>String s = list.get(0);  // 형변환 불필요</a:t>
-            </a:r>
-          </a:p>
-          <a:p>
-            <a:pPr algn="l">
-              <a:spcAft>
-                <a:spcPts val="800"/>
-              </a:spcAft>
-              <a:defRPr sz="1600">
-                <a:solidFill>
-                  <a:srgbClr val="1E293B"/>
-                </a:solidFill>
-                <a:latin typeface="Calibri"/>
-              </a:defRPr>
-            </a:pPr>
-            <a:r>
-              <a:t>제네릭 메서드 예제:</a:t>
-            </a:r>
-          </a:p>
-          <a:p>
-            <a:pPr algn="l">
-              <a:spcAft>
-                <a:spcPts val="800"/>
-              </a:spcAft>
-              <a:defRPr sz="1600">
-                <a:solidFill>
-                  <a:srgbClr val="1E293B"/>
-                </a:solidFill>
-                <a:latin typeface="Calibri"/>
-              </a:defRPr>
-            </a:pPr>
-            <a:r>
-              <a:t>  public static &lt;T&gt; void printList(List&lt;T&gt; list) { ... }</a:t>
-            </a:r>
-          </a:p>
-          <a:p>
-            <a:pPr algn="l">
-              <a:spcAft>
-                <a:spcPts val="800"/>
-              </a:spcAft>
-              <a:defRPr sz="1600">
-                <a:solidFill>
-                  <a:srgbClr val="1E293B"/>
-                </a:solidFill>
-                <a:latin typeface="Calibri"/>
-              </a:defRPr>
-            </a:pPr>
-            <a:r>
-              <a:t>와일드카드: List&lt;?&gt;, List&lt;? extends Number&gt;, List&lt;? super Integer&gt;</a:t>
+            <a:r>
+              <a:t>타입 안정성: 컴파일 시점에 저장 가능한 타입 검사</a:t>
+            </a:r>
+          </a:p>
+          <a:p>
+            <a:r>
+              <a:t>List&lt;GameCharacter&gt; party = new ArrayList&lt;&gt;();</a:t>
+            </a:r>
+          </a:p>
+          <a:p>
+            <a:r>
+              <a:t>Map&lt;String, ItemSpec&gt; itemTable = new HashMap&lt;&gt;();</a:t>
+            </a:r>
+          </a:p>
+          <a:p>
+            <a:r>
+              <a:t>제네릭을 쓰면 잘못된 타입 저장을 막고</a:t>
+            </a:r>
+          </a:p>
+          <a:p>
+            <a:r>
+              <a:t>형변환 없이 안전하게 값을 꺼낼 수 있다.</a:t>
             </a:r>
           </a:p>
         </p:txBody>
@@ -5147,16 +4720,8 @@
           </a:bodyPr>
           <a:lstStyle/>
           <a:p>
-            <a:pPr>
-              <a:defRPr sz="2200" b="1">
-                <a:solidFill>
-                  <a:srgbClr val="065A82"/>
-                </a:solidFill>
-                <a:latin typeface="Georgia"/>
-              </a:defRPr>
-            </a:pPr>
-            <a:r>
-              <a:t>예제 01 - ArrayList 기본 연산</a:t>
+            <a:r>
+              <a:t>예제 1 - List 기반 파티 캐릭터 관리</a:t>
             </a:r>
           </a:p>
         </p:txBody>
@@ -5226,131 +4791,38 @@
           </a:bodyPr>
           <a:lstStyle/>
           <a:p>
-            <a:pPr algn="l">
-              <a:spcAft>
-                <a:spcPts val="100"/>
-              </a:spcAft>
-              <a:defRPr sz="1100">
-                <a:solidFill>
-                  <a:srgbClr val="E2E8F0"/>
-                </a:solidFill>
-                <a:latin typeface="Consolas"/>
-              </a:defRPr>
-            </a:pPr>
-            <a:r>
-              <a:t>ArrayList&lt;String&gt; list = new ArrayList&lt;&gt;();</a:t>
-            </a:r>
-          </a:p>
-          <a:p>
-            <a:pPr algn="l">
-              <a:spcAft>
-                <a:spcPts val="100"/>
-              </a:spcAft>
-              <a:defRPr sz="1100">
-                <a:solidFill>
-                  <a:srgbClr val="E2E8F0"/>
-                </a:solidFill>
-                <a:latin typeface="Consolas"/>
-              </a:defRPr>
-            </a:pPr>
-            <a:r>
-              <a:t>list.add("Java");</a:t>
-            </a:r>
-          </a:p>
-          <a:p>
-            <a:pPr algn="l">
-              <a:spcAft>
-                <a:spcPts val="100"/>
-              </a:spcAft>
-              <a:defRPr sz="1100">
-                <a:solidFill>
-                  <a:srgbClr val="E2E8F0"/>
-                </a:solidFill>
-                <a:latin typeface="Consolas"/>
-              </a:defRPr>
-            </a:pPr>
-            <a:r>
-              <a:t>list.add("Python");</a:t>
-            </a:r>
-          </a:p>
-          <a:p>
-            <a:pPr algn="l">
-              <a:spcAft>
-                <a:spcPts val="100"/>
-              </a:spcAft>
-              <a:defRPr sz="1100">
-                <a:solidFill>
-                  <a:srgbClr val="E2E8F0"/>
-                </a:solidFill>
-                <a:latin typeface="Consolas"/>
-              </a:defRPr>
-            </a:pPr>
-            <a:r>
-              <a:t>list.add("C++");</a:t>
-            </a:r>
-          </a:p>
-          <a:p>
-            <a:pPr algn="l">
-              <a:spcAft>
-                <a:spcPts val="100"/>
-              </a:spcAft>
-              <a:defRPr sz="1100">
-                <a:solidFill>
-                  <a:srgbClr val="E2E8F0"/>
-                </a:solidFill>
-                <a:latin typeface="Consolas"/>
-              </a:defRPr>
-            </a:pPr>
-            <a:r>
-              <a:t>System.out.println(list.get(0));  // Java</a:t>
-            </a:r>
-          </a:p>
-          <a:p>
-            <a:pPr algn="l">
-              <a:spcAft>
-                <a:spcPts val="100"/>
-              </a:spcAft>
-              <a:defRPr sz="1100">
-                <a:solidFill>
-                  <a:srgbClr val="E2E8F0"/>
-                </a:solidFill>
-                <a:latin typeface="Consolas"/>
-              </a:defRPr>
-            </a:pPr>
-            <a:r>
-              <a:t>System.out.println(list.contains("Python"));  // true</a:t>
-            </a:r>
-          </a:p>
-          <a:p>
-            <a:pPr algn="l">
-              <a:spcAft>
-                <a:spcPts val="100"/>
-              </a:spcAft>
-              <a:defRPr sz="1100">
-                <a:solidFill>
-                  <a:srgbClr val="E2E8F0"/>
-                </a:solidFill>
-                <a:latin typeface="Consolas"/>
-              </a:defRPr>
-            </a:pPr>
-            <a:r>
-              <a:t>list.remove(1);</a:t>
-            </a:r>
-          </a:p>
-          <a:p>
-            <a:pPr algn="l">
-              <a:spcAft>
-                <a:spcPts val="100"/>
-              </a:spcAft>
-              <a:defRPr sz="1100">
-                <a:solidFill>
-                  <a:srgbClr val="E2E8F0"/>
-                </a:solidFill>
-                <a:latin typeface="Consolas"/>
-              </a:defRPr>
-            </a:pPr>
-            <a:r>
-              <a:t>System.out.println(list.size());  // 2</a:t>
+            <a:r>
+              <a:t>PartyManager partyManager = new PartyManager();</a:t>
+            </a:r>
+          </a:p>
+          <a:p>
+            <a:r>
+              <a:t>partyManager.addCharacter(new GameCharacter("warrior_01", "브론", "전사", 12, 180));</a:t>
+            </a:r>
+          </a:p>
+          <a:p>
+            <a:r>
+              <a:t>partyManager.addCharacter(new GameCharacter("mage_01", "세리아", "마법사", 18, 90));</a:t>
+            </a:r>
+          </a:p>
+          <a:p>
+            <a:r>
+              <a:t>partyManager.insertCharacter(1,</a:t>
+            </a:r>
+          </a:p>
+          <a:p>
+            <a:r>
+              <a:t>        new GameCharacter("priest_01", "리아", "사제", 14, 100));</a:t>
+            </a:r>
+          </a:p>
+          <a:p>
+            <a:r>
+              <a:t>partyManager.removeByIndex(2);</a:t>
+            </a:r>
+          </a:p>
+          <a:p>
+            <a:r>
+              <a:t>partyManager.removeByName("브론");</a:t>
             </a:r>
           </a:p>
         </p:txBody>
@@ -5377,51 +4849,18 @@
           </a:bodyPr>
           <a:lstStyle/>
           <a:p>
-            <a:pPr algn="l">
-              <a:spcAft>
-                <a:spcPts val="600"/>
-              </a:spcAft>
-              <a:defRPr sz="1300">
-                <a:solidFill>
-                  <a:srgbClr val="475569"/>
-                </a:solidFill>
-                <a:latin typeface="Calibri"/>
-              </a:defRPr>
-            </a:pPr>
-            <a:r>
-              <a:t>add/remove/get</a:t>
-            </a:r>
-          </a:p>
-          <a:p>
-            <a:pPr algn="l">
-              <a:spcAft>
-                <a:spcPts val="600"/>
-              </a:spcAft>
-              <a:defRPr sz="1300">
-                <a:solidFill>
-                  <a:srgbClr val="475569"/>
-                </a:solidFill>
-                <a:latin typeface="Calibri"/>
-              </a:defRPr>
-            </a:pPr>
-            <a:r>
-              <a:t>contains로 존재 확인</a:t>
-            </a:r>
-          </a:p>
-          <a:p>
-            <a:pPr algn="l">
-              <a:spcAft>
-                <a:spcPts val="600"/>
-              </a:spcAft>
-              <a:defRPr sz="1300">
-                <a:solidFill>
-                  <a:srgbClr val="475569"/>
-                </a:solidFill>
-                <a:latin typeface="Calibri"/>
-              </a:defRPr>
-            </a:pPr>
-            <a:r>
-              <a:t>size로 크기 조회</a:t>
+            <a:r>
+              <a:t>add: 파티 끝에 영입</a:t>
+            </a:r>
+          </a:p>
+          <a:p>
+            <a:r>
+              <a:t>insertCharacter: 원하는 슬롯에 삽입</a:t>
+            </a:r>
+          </a:p>
+          <a:p>
+            <a:r>
+              <a:t>remove: 인덱스 또는 이름으로 제거</a:t>
             </a:r>
           </a:p>
         </p:txBody>
@@ -5552,16 +4991,8 @@
           </a:bodyPr>
           <a:lstStyle/>
           <a:p>
-            <a:pPr>
-              <a:defRPr sz="2200" b="1">
-                <a:solidFill>
-                  <a:srgbClr val="065A82"/>
-                </a:solidFill>
-                <a:latin typeface="Georgia"/>
-              </a:defRPr>
-            </a:pPr>
-            <a:r>
-              <a:t>예제 02 - HashMap 키-값 연산</a:t>
+            <a:r>
+              <a:t>예제 2 - Map 기반 아이템 명세 관리</a:t>
             </a:r>
           </a:p>
         </p:txBody>
@@ -5631,131 +5062,34 @@
           </a:bodyPr>
           <a:lstStyle/>
           <a:p>
-            <a:pPr algn="l">
-              <a:spcAft>
-                <a:spcPts val="100"/>
-              </a:spcAft>
-              <a:defRPr sz="1100">
-                <a:solidFill>
-                  <a:srgbClr val="E2E8F0"/>
-                </a:solidFill>
-                <a:latin typeface="Consolas"/>
-              </a:defRPr>
-            </a:pPr>
-            <a:r>
-              <a:t>HashMap&lt;String, String&gt; map = new HashMap&lt;&gt;();</a:t>
-            </a:r>
-          </a:p>
-          <a:p>
-            <a:pPr algn="l">
-              <a:spcAft>
-                <a:spcPts val="100"/>
-              </a:spcAft>
-              <a:defRPr sz="1100">
-                <a:solidFill>
-                  <a:srgbClr val="E2E8F0"/>
-                </a:solidFill>
-                <a:latin typeface="Consolas"/>
-              </a:defRPr>
-            </a:pPr>
-            <a:r>
-              <a:t>map.put("apple", "사과");</a:t>
-            </a:r>
-          </a:p>
-          <a:p>
-            <a:pPr algn="l">
-              <a:spcAft>
-                <a:spcPts val="100"/>
-              </a:spcAft>
-              <a:defRPr sz="1100">
-                <a:solidFill>
-                  <a:srgbClr val="E2E8F0"/>
-                </a:solidFill>
-                <a:latin typeface="Consolas"/>
-              </a:defRPr>
-            </a:pPr>
-            <a:r>
-              <a:t>map.put("banana", "바나나");</a:t>
-            </a:r>
-          </a:p>
-          <a:p>
-            <a:pPr algn="l">
-              <a:spcAft>
-                <a:spcPts val="100"/>
-              </a:spcAft>
-              <a:defRPr sz="1100">
-                <a:solidFill>
-                  <a:srgbClr val="E2E8F0"/>
-                </a:solidFill>
-                <a:latin typeface="Consolas"/>
-              </a:defRPr>
-            </a:pPr>
-            <a:r>
-              <a:t>map.put("cherry", "체리");</a:t>
-            </a:r>
-          </a:p>
-          <a:p>
-            <a:pPr algn="l">
-              <a:spcAft>
-                <a:spcPts val="100"/>
-              </a:spcAft>
-              <a:defRPr sz="1100">
-                <a:solidFill>
-                  <a:srgbClr val="E2E8F0"/>
-                </a:solidFill>
-                <a:latin typeface="Consolas"/>
-              </a:defRPr>
-            </a:pPr>
-            <a:r>
-              <a:t>System.out.println(map.get("apple"));  // 사과</a:t>
-            </a:r>
-          </a:p>
-          <a:p>
-            <a:pPr algn="l">
-              <a:spcAft>
-                <a:spcPts val="100"/>
-              </a:spcAft>
-              <a:defRPr sz="1100">
-                <a:solidFill>
-                  <a:srgbClr val="E2E8F0"/>
-                </a:solidFill>
-                <a:latin typeface="Consolas"/>
-              </a:defRPr>
-            </a:pPr>
-            <a:r>
-              <a:t>for (String key : map.keySet()) {</a:t>
-            </a:r>
-          </a:p>
-          <a:p>
-            <a:pPr algn="l">
-              <a:spcAft>
-                <a:spcPts val="100"/>
-              </a:spcAft>
-              <a:defRPr sz="1100">
-                <a:solidFill>
-                  <a:srgbClr val="E2E8F0"/>
-                </a:solidFill>
-                <a:latin typeface="Consolas"/>
-              </a:defRPr>
-            </a:pPr>
-            <a:r>
-              <a:t>    System.out.println(key + ": " + map.get(key));</a:t>
-            </a:r>
-          </a:p>
-          <a:p>
-            <a:pPr algn="l">
-              <a:spcAft>
-                <a:spcPts val="100"/>
-              </a:spcAft>
-              <a:defRPr sz="1100">
-                <a:solidFill>
-                  <a:srgbClr val="E2E8F0"/>
-                </a:solidFill>
-                <a:latin typeface="Consolas"/>
-              </a:defRPr>
-            </a:pPr>
-            <a:r>
-              <a:t>}</a:t>
+            <a:r>
+              <a:t>ItemManager itemManager = new ItemManager();</a:t>
+            </a:r>
+          </a:p>
+          <a:p>
+            <a:r>
+              <a:t>itemManager.addItem(new ItemSpec("sword_001", "초보자 검", "Common", 100, 5, true));</a:t>
+            </a:r>
+          </a:p>
+          <a:p>
+            <a:r>
+              <a:t>itemManager.addItem(new ItemSpec("staff_001", "견습 마법봉", "Rare", 300, 8, true));</a:t>
+            </a:r>
+          </a:p>
+          <a:p/>
+          <a:p>
+            <a:r>
+              <a:t>System.out.println(itemManager.getItem("staff_001"));</a:t>
+            </a:r>
+          </a:p>
+          <a:p>
+            <a:r>
+              <a:t>itemManager.updatePrice("sword_001", 150);</a:t>
+            </a:r>
+          </a:p>
+          <a:p>
+            <a:r>
+              <a:t>itemManager.removeItem("armor_001");</a:t>
             </a:r>
           </a:p>
         </p:txBody>
@@ -5782,51 +5116,18 @@
           </a:bodyPr>
           <a:lstStyle/>
           <a:p>
-            <a:pPr algn="l">
-              <a:spcAft>
-                <a:spcPts val="600"/>
-              </a:spcAft>
-              <a:defRPr sz="1300">
-                <a:solidFill>
-                  <a:srgbClr val="475569"/>
-                </a:solidFill>
-                <a:latin typeface="Calibri"/>
-              </a:defRPr>
-            </a:pPr>
-            <a:r>
-              <a:t>put으로 키-값 저장</a:t>
-            </a:r>
-          </a:p>
-          <a:p>
-            <a:pPr algn="l">
-              <a:spcAft>
-                <a:spcPts val="600"/>
-              </a:spcAft>
-              <a:defRPr sz="1300">
-                <a:solidFill>
-                  <a:srgbClr val="475569"/>
-                </a:solidFill>
-                <a:latin typeface="Calibri"/>
-              </a:defRPr>
-            </a:pPr>
-            <a:r>
-              <a:t>get으로 값 조회</a:t>
-            </a:r>
-          </a:p>
-          <a:p>
-            <a:pPr algn="l">
-              <a:spcAft>
-                <a:spcPts val="600"/>
-              </a:spcAft>
-              <a:defRPr sz="1300">
-                <a:solidFill>
-                  <a:srgbClr val="475569"/>
-                </a:solidFill>
-                <a:latin typeface="Calibri"/>
-              </a:defRPr>
-            </a:pPr>
-            <a:r>
-              <a:t>keySet으로 모든 키 순회</a:t>
+            <a:r>
+              <a:t>put 성격의 addItem으로 등록</a:t>
+            </a:r>
+          </a:p>
+          <a:p>
+            <a:r>
+              <a:t>getItem으로 코드 기반 조회</a:t>
+            </a:r>
+          </a:p>
+          <a:p>
+            <a:r>
+              <a:t>update/remove로 데이터 갱신</a:t>
             </a:r>
           </a:p>
         </p:txBody>
@@ -5957,16 +5258,8 @@
           </a:bodyPr>
           <a:lstStyle/>
           <a:p>
-            <a:pPr>
-              <a:defRPr sz="2200" b="1">
-                <a:solidFill>
-                  <a:srgbClr val="065A82"/>
-                </a:solidFill>
-                <a:latin typeface="Georgia"/>
-              </a:defRPr>
-            </a:pPr>
-            <a:r>
-              <a:t>예제 03 - Comparator로 정렬</a:t>
+            <a:r>
+              <a:t>List와 Map 선택 기준</a:t>
             </a:r>
           </a:p>
         </p:txBody>
@@ -6036,147 +5329,44 @@
           </a:bodyPr>
           <a:lstStyle/>
           <a:p>
-            <a:pPr algn="l">
-              <a:spcAft>
-                <a:spcPts val="100"/>
-              </a:spcAft>
-              <a:defRPr sz="1100">
-                <a:solidFill>
-                  <a:srgbClr val="E2E8F0"/>
-                </a:solidFill>
-                <a:latin typeface="Consolas"/>
-              </a:defRPr>
-            </a:pPr>
-            <a:r>
-              <a:t>class Student {</a:t>
-            </a:r>
-          </a:p>
-          <a:p>
-            <a:pPr algn="l">
-              <a:spcAft>
-                <a:spcPts val="100"/>
-              </a:spcAft>
-              <a:defRPr sz="1100">
-                <a:solidFill>
-                  <a:srgbClr val="E2E8F0"/>
-                </a:solidFill>
-                <a:latin typeface="Consolas"/>
-              </a:defRPr>
-            </a:pPr>
-            <a:r>
-              <a:t>    int id; String name; int score;</a:t>
-            </a:r>
-          </a:p>
-          <a:p>
-            <a:pPr algn="l">
-              <a:spcAft>
-                <a:spcPts val="100"/>
-              </a:spcAft>
-              <a:defRPr sz="1100">
-                <a:solidFill>
-                  <a:srgbClr val="E2E8F0"/>
-                </a:solidFill>
-                <a:latin typeface="Consolas"/>
-              </a:defRPr>
-            </a:pPr>
-            <a:r>
-              <a:t>}</a:t>
-            </a:r>
-          </a:p>
-          <a:p>
-            <a:pPr algn="l">
-              <a:spcAft>
-                <a:spcPts val="100"/>
-              </a:spcAft>
-              <a:defRPr sz="1100">
-                <a:solidFill>
-                  <a:srgbClr val="E2E8F0"/>
-                </a:solidFill>
-                <a:latin typeface="Consolas"/>
-              </a:defRPr>
-            </a:pPr>
-            <a:r>
-              <a:t>List&lt;Student&gt; students = new ArrayList&lt;&gt;();</a:t>
-            </a:r>
-          </a:p>
-          <a:p>
-            <a:pPr algn="l">
-              <a:spcAft>
-                <a:spcPts val="100"/>
-              </a:spcAft>
-              <a:defRPr sz="1100">
-                <a:solidFill>
-                  <a:srgbClr val="E2E8F0"/>
-                </a:solidFill>
-                <a:latin typeface="Consolas"/>
-              </a:defRPr>
-            </a:pPr>
-            <a:r>
-              <a:t>// 점수 내림차순, 같으면 ID 오름차순</a:t>
-            </a:r>
-          </a:p>
-          <a:p>
-            <a:pPr algn="l">
-              <a:spcAft>
-                <a:spcPts val="100"/>
-              </a:spcAft>
-              <a:defRPr sz="1100">
-                <a:solidFill>
-                  <a:srgbClr val="E2E8F0"/>
-                </a:solidFill>
-                <a:latin typeface="Consolas"/>
-              </a:defRPr>
-            </a:pPr>
-            <a:r>
-              <a:t>students.sort(</a:t>
-            </a:r>
-          </a:p>
-          <a:p>
-            <a:pPr algn="l">
-              <a:spcAft>
-                <a:spcPts val="100"/>
-              </a:spcAft>
-              <a:defRPr sz="1100">
-                <a:solidFill>
-                  <a:srgbClr val="E2E8F0"/>
-                </a:solidFill>
-                <a:latin typeface="Consolas"/>
-              </a:defRPr>
-            </a:pPr>
-            <a:r>
-              <a:t>    Comparator.comparingInt(Student::getScore).reversed()</a:t>
-            </a:r>
-          </a:p>
-          <a:p>
-            <a:pPr algn="l">
-              <a:spcAft>
-                <a:spcPts val="100"/>
-              </a:spcAft>
-              <a:defRPr sz="1100">
-                <a:solidFill>
-                  <a:srgbClr val="E2E8F0"/>
-                </a:solidFill>
-                <a:latin typeface="Consolas"/>
-              </a:defRPr>
-            </a:pPr>
-            <a:r>
-              <a:t>        .thenComparingInt(Student::getId)</a:t>
-            </a:r>
-          </a:p>
-          <a:p>
-            <a:pPr algn="l">
-              <a:spcAft>
-                <a:spcPts val="100"/>
-              </a:spcAft>
-              <a:defRPr sz="1100">
-                <a:solidFill>
-                  <a:srgbClr val="E2E8F0"/>
-                </a:solidFill>
-                <a:latin typeface="Consolas"/>
-              </a:defRPr>
-            </a:pPr>
-            <a:r>
-              <a:t>);</a:t>
+            <a:r>
+              <a:t>List를 써야 하는 경우</a:t>
+            </a:r>
+          </a:p>
+          <a:p>
+            <a:r>
+              <a:t>• 순서가 중요할 때</a:t>
+            </a:r>
+          </a:p>
+          <a:p>
+            <a:r>
+              <a:t>• 몇 번째 슬롯인지가 중요할 때</a:t>
+            </a:r>
+          </a:p>
+          <a:p>
+            <a:r>
+              <a:t>• 중간 삽입과 삭제가 필요할 때</a:t>
+            </a:r>
+          </a:p>
+          <a:p/>
+          <a:p>
+            <a:r>
+              <a:t>Map을 써야 하는 경우</a:t>
+            </a:r>
+          </a:p>
+          <a:p>
+            <a:r>
+              <a:t>• 코드나 이름표로 바로 찾고 싶을 때</a:t>
+            </a:r>
+          </a:p>
+          <a:p>
+            <a:r>
+              <a:t>• 키와 값이 짝을 이루는 데이터일 때</a:t>
+            </a:r>
+          </a:p>
+          <a:p>
+            <a:r>
+              <a:t>• 조회 속도가 중요한 관리 테이블일 때</a:t>
             </a:r>
           </a:p>
         </p:txBody>
@@ -6203,67 +5393,13 @@
           </a:bodyPr>
           <a:lstStyle/>
           <a:p>
-            <a:pPr algn="l">
-              <a:spcAft>
-                <a:spcPts val="600"/>
-              </a:spcAft>
-              <a:defRPr sz="1300">
-                <a:solidFill>
-                  <a:srgbClr val="475569"/>
-                </a:solidFill>
-                <a:latin typeface="Calibri"/>
-              </a:defRPr>
-            </a:pPr>
-            <a:r>
-              <a:t>Comparator.comparing...</a:t>
-            </a:r>
-          </a:p>
-          <a:p>
-            <a:pPr algn="l">
-              <a:spcAft>
-                <a:spcPts val="600"/>
-              </a:spcAft>
-              <a:defRPr sz="1300">
-                <a:solidFill>
-                  <a:srgbClr val="475569"/>
-                </a:solidFill>
-                <a:latin typeface="Calibri"/>
-              </a:defRPr>
-            </a:pPr>
-            <a:r>
-              <a:t>메서드 참조 사용</a:t>
-            </a:r>
-          </a:p>
-          <a:p>
-            <a:pPr algn="l">
-              <a:spcAft>
-                <a:spcPts val="600"/>
-              </a:spcAft>
-              <a:defRPr sz="1300">
-                <a:solidFill>
-                  <a:srgbClr val="475569"/>
-                </a:solidFill>
-                <a:latin typeface="Calibri"/>
-              </a:defRPr>
-            </a:pPr>
-            <a:r>
-              <a:t>reversed로 역순</a:t>
-            </a:r>
-          </a:p>
-          <a:p>
-            <a:pPr algn="l">
-              <a:spcAft>
-                <a:spcPts val="600"/>
-              </a:spcAft>
-              <a:defRPr sz="1300">
-                <a:solidFill>
-                  <a:srgbClr val="475569"/>
-                </a:solidFill>
-                <a:latin typeface="Calibri"/>
-              </a:defRPr>
-            </a:pPr>
-            <a:r>
-              <a:t>thenComparing으로 차순</a:t>
+            <a:r>
+              <a:t>List: 순서 중심</a:t>
+            </a:r>
+          </a:p>
+          <a:p>
+            <a:r>
+              <a:t>Map: 검색 중심</a:t>
             </a:r>
           </a:p>
         </p:txBody>
@@ -6394,16 +5530,8 @@
           </a:bodyPr>
           <a:lstStyle/>
           <a:p>
-            <a:pPr algn="l">
-              <a:defRPr sz="2400" b="1">
-                <a:solidFill>
-                  <a:srgbClr val="065A82"/>
-                </a:solidFill>
-                <a:latin typeface="Georgia"/>
-              </a:defRPr>
-            </a:pPr>
-            <a:r>
-              <a:t>반복 방법들 (Iteration)</a:t>
+            <a:r>
+              <a:t>반복과 출력</a:t>
             </a:r>
           </a:p>
         </p:txBody>
@@ -6430,99 +5558,29 @@
           </a:bodyPr>
           <a:lstStyle/>
           <a:p>
-            <a:pPr algn="l">
-              <a:spcAft>
-                <a:spcPts val="800"/>
-              </a:spcAft>
-              <a:defRPr sz="1600">
-                <a:solidFill>
-                  <a:srgbClr val="1E293B"/>
-                </a:solidFill>
-                <a:latin typeface="Calibri"/>
-              </a:defRPr>
-            </a:pPr>
-            <a:r>
-              <a:t>for-each 루프: for (String s : list) { ... }</a:t>
-            </a:r>
-          </a:p>
-          <a:p>
-            <a:pPr algn="l">
-              <a:spcAft>
-                <a:spcPts val="800"/>
-              </a:spcAft>
-              <a:defRPr sz="1600">
-                <a:solidFill>
-                  <a:srgbClr val="1E293B"/>
-                </a:solidFill>
-                <a:latin typeface="Calibri"/>
-              </a:defRPr>
-            </a:pPr>
-            <a:r>
-              <a:t>Iterator: Iterator&lt;T&gt; it = list.iterator();</a:t>
-            </a:r>
-          </a:p>
-          <a:p>
-            <a:pPr algn="l">
-              <a:spcAft>
-                <a:spcPts val="800"/>
-              </a:spcAft>
-              <a:defRPr sz="1600">
-                <a:solidFill>
-                  <a:srgbClr val="1E293B"/>
-                </a:solidFill>
-                <a:latin typeface="Calibri"/>
-              </a:defRPr>
-            </a:pPr>
-            <a:r>
-              <a:t>  while (it.hasNext()) { T element = it.next(); }</a:t>
-            </a:r>
-          </a:p>
-          <a:p>
-            <a:pPr algn="l">
-              <a:spcAft>
-                <a:spcPts val="800"/>
-              </a:spcAft>
-              <a:defRPr sz="1600">
-                <a:solidFill>
-                  <a:srgbClr val="1E293B"/>
-                </a:solidFill>
-                <a:latin typeface="Calibri"/>
-              </a:defRPr>
-            </a:pPr>
-            <a:r>
-              <a:t>forEach 메서드: list.forEach(s -&gt; System.out.println(s));</a:t>
-            </a:r>
-          </a:p>
-          <a:p>
-            <a:pPr algn="l">
-              <a:spcAft>
-                <a:spcPts val="800"/>
-              </a:spcAft>
-              <a:defRPr sz="1600">
-                <a:solidFill>
-                  <a:srgbClr val="1E293B"/>
-                </a:solidFill>
-                <a:latin typeface="Calibri"/>
-              </a:defRPr>
-            </a:pPr>
-            <a:r>
-              <a:t>스트림: list.stream().forEach(System.out::println);</a:t>
-            </a:r>
-          </a:p>
-          <a:p>
-            <a:pPr algn="l">
-              <a:spcAft>
-                <a:spcPts val="800"/>
-              </a:spcAft>
-              <a:defRPr sz="1600">
-                <a:solidFill>
-                  <a:srgbClr val="1E293B"/>
-                </a:solidFill>
-                <a:latin typeface="Calibri"/>
-              </a:defRPr>
-            </a:pPr>
-            <a:r>
-              <a:t>인덱스 기반: for (int i = 0; i &lt; list.size(); i++)</a:t>
+            <a:r>
+              <a:t>List 순회: for (int i = 0; i &lt; party.size(); i++)</a:t>
+            </a:r>
+          </a:p>
+          <a:p>
+            <a:r>
+              <a:t>Map 순회: for (Map.Entry&lt;String, ItemSpec&gt; entry : itemTable.entrySet())</a:t>
+            </a:r>
+          </a:p>
+          <a:p/>
+          <a:p>
+            <a:r>
+              <a:t>컬렉션은 저장만 하는 것이 아니라</a:t>
+            </a:r>
+          </a:p>
+          <a:p>
+            <a:r>
+              <a:t>반복하면서 전체 상태를 출력하거나</a:t>
+            </a:r>
+          </a:p>
+          <a:p>
+            <a:r>
+              <a:t>조건에 맞는 데이터를 찾아 처리하는 데 자주 사용된다.</a:t>
             </a:r>
           </a:p>
         </p:txBody>
@@ -6653,16 +5711,8 @@
           </a:bodyPr>
           <a:lstStyle/>
           <a:p>
-            <a:pPr>
-              <a:defRPr sz="2400" b="1">
-                <a:solidFill>
-                  <a:srgbClr val="0EA5E9"/>
-                </a:solidFill>
-                <a:latin typeface="Georgia"/>
-              </a:defRPr>
-            </a:pPr>
-            <a:r>
-              <a:t>실습 1: 단어 사전 만들기</a:t>
+            <a:r>
+              <a:t>실습 1: 파티 캐릭터 관리</a:t>
             </a:r>
           </a:p>
         </p:txBody>
@@ -6689,83 +5739,28 @@
           </a:bodyPr>
           <a:lstStyle/>
           <a:p>
-            <a:pPr>
-              <a:spcAft>
-                <a:spcPts val="600"/>
-              </a:spcAft>
-              <a:defRPr sz="1500">
-                <a:solidFill>
-                  <a:srgbClr val="1E293B"/>
-                </a:solidFill>
-                <a:latin typeface="Calibri"/>
-              </a:defRPr>
-            </a:pPr>
-            <a:r>
-              <a:t>HashMap&lt;String, String&gt;을 사용해 한-영 단어 사전 작성</a:t>
-            </a:r>
-          </a:p>
-          <a:p>
-            <a:pPr>
-              <a:spcAft>
-                <a:spcPts val="600"/>
-              </a:spcAft>
-              <a:defRPr sz="1500">
-                <a:solidFill>
-                  <a:srgbClr val="1E293B"/>
-                </a:solidFill>
-                <a:latin typeface="Calibri"/>
-              </a:defRPr>
-            </a:pPr>
-            <a:r>
-              <a:t>put으로 10개 단어 쌍 추가</a:t>
-            </a:r>
-          </a:p>
-          <a:p>
-            <a:pPr>
-              <a:spcAft>
-                <a:spcPts val="600"/>
-              </a:spcAft>
-              <a:defRPr sz="1500">
-                <a:solidFill>
-                  <a:srgbClr val="1E293B"/>
-                </a:solidFill>
-                <a:latin typeface="Calibri"/>
-              </a:defRPr>
-            </a:pPr>
-            <a:r>
-              <a:t>get으로 특정 단어 검색</a:t>
-            </a:r>
-          </a:p>
-          <a:p>
-            <a:pPr>
-              <a:spcAft>
-                <a:spcPts val="600"/>
-              </a:spcAft>
-              <a:defRPr sz="1500">
-                <a:solidFill>
-                  <a:srgbClr val="1E293B"/>
-                </a:solidFill>
-                <a:latin typeface="Calibri"/>
-              </a:defRPr>
-            </a:pPr>
-            <a:r>
-              <a:t>keySet 순회로 모든 단어 출력</a:t>
-            </a:r>
-          </a:p>
-          <a:p>
-            <a:pPr>
-              <a:spcAft>
-                <a:spcPts val="600"/>
-              </a:spcAft>
-              <a:defRPr sz="1500">
-                <a:solidFill>
-                  <a:srgbClr val="1E293B"/>
-                </a:solidFill>
-                <a:latin typeface="Calibri"/>
-              </a:defRPr>
-            </a:pPr>
-            <a:r>
-              <a:t>containsKey로 단어 존재 확인</a:t>
+            <a:r>
+              <a:t>ArrayList 또는 List&lt;GameCharacter&gt;를 사용해 파티를 구성하시오.</a:t>
+            </a:r>
+          </a:p>
+          <a:p>
+            <a:r>
+              <a:t>1. 캐릭터 3명을 추가한다.</a:t>
+            </a:r>
+          </a:p>
+          <a:p>
+            <a:r>
+              <a:t>2. 1번 슬롯에 새 캐릭터를 삽입한다.</a:t>
+            </a:r>
+          </a:p>
+          <a:p>
+            <a:r>
+              <a:t>3. 특정 이름의 캐릭터 1명을 제거한다.</a:t>
+            </a:r>
+          </a:p>
+          <a:p>
+            <a:r>
+              <a:t>4. 최종 파티 상태를 출력한다.</a:t>
             </a:r>
           </a:p>
         </p:txBody>
@@ -6835,35 +5830,13 @@
           </a:bodyPr>
           <a:lstStyle/>
           <a:p>
-            <a:pPr>
-              <a:spcAft>
-                <a:spcPts val="200"/>
-              </a:spcAft>
-              <a:defRPr sz="1200">
-                <a:solidFill>
-                  <a:srgbClr val="E2E8F0"/>
-                </a:solidFill>
-                <a:latin typeface="Consolas"/>
-              </a:defRPr>
-            </a:pPr>
-            <a:r>
-              <a:t>java WordDictionary</a:t>
-            </a:r>
-          </a:p>
-          <a:p>
-            <a:pPr>
-              <a:spcAft>
-                <a:spcPts val="200"/>
-              </a:spcAft>
-              <a:defRPr sz="1200">
-                <a:solidFill>
-                  <a:srgbClr val="E2E8F0"/>
-                </a:solidFill>
-                <a:latin typeface="Consolas"/>
-              </a:defRPr>
-            </a:pPr>
-            <a:r>
-              <a:t># HashMap 조작 결과 확인</a:t>
+            <a:r>
+              <a:t>java -cp out/classes chapter06.ex01.Ex01</a:t>
+            </a:r>
+          </a:p>
+          <a:p>
+            <a:r>
+              <a:t># 파티 슬롯 변화 확인</a:t>
             </a:r>
           </a:p>
         </p:txBody>
